--- a/PPTs/Lecture 6 - IP Addressing Exercises.pptx
+++ b/PPTs/Lecture 6 - IP Addressing Exercises.pptx
@@ -13861,11 +13861,11 @@
         </p:spPr>
         <p:txBody>
           <a:bodyPr spcFirstLastPara="1" wrap="square" lIns="91425" tIns="91425" rIns="91425" bIns="91425" anchor="t" anchorCtr="0">
-            <a:normAutofit fontScale="85000" lnSpcReduction="20000"/>
+            <a:normAutofit fontScale="77500" lnSpcReduction="20000"/>
           </a:bodyPr>
           <a:lstStyle/>
           <a:p>
-            <a:pPr marL="114300" lvl="0" indent="0">
+            <a:pPr marL="114300" indent="0">
               <a:buNone/>
             </a:pPr>
             <a:r>
@@ -13878,8 +13878,17 @@
             </a:r>
             <a:r>
               <a:rPr lang="en-US" dirty="0"/>
-              <a:t> Routing) addressing scheme is used, and that the domain hofstra.edu has the 123.100.0.0/16 prefix reserved.</a:t>
+              <a:t> Routing) addressing scheme is used, and that the domain hofstra.edu has the 123.100.0.0/16 prefix reserved. </a:t>
             </a:r>
+            <a:r>
+              <a:rPr lang="en-US" altLang="zh-CN" dirty="0"/>
+              <a:t>For each problem, choose the smallest unused prefix to assign </a:t>
+            </a:r>
+            <a:r>
+              <a:rPr lang="en-US" altLang="zh-CN"/>
+              <a:t>next.</a:t>
+            </a:r>
+            <a:endParaRPr lang="en-US" dirty="0"/>
           </a:p>
           <a:p>
             <a:pPr lvl="0">
